--- a/CostVision-CAPEE-Business-Case.pptx
+++ b/CostVision-CAPEE-Business-Case.pptx
@@ -4169,7 +4169,7 @@
             <a:avLst/>
           </a:prstGeom>
           <a:solidFill>
-            <a:srgbClr val="B7791F"/>
+            <a:srgbClr val="99651A"/>
           </a:solidFill>
           <a:ln>
             <a:noFill/>
@@ -4273,7 +4273,7 @@
             <a:r>
               <a:rPr sz="1050" b="1" i="0">
                 <a:solidFill>
-                  <a:srgbClr val="2E8B57"/>
+                  <a:srgbClr val="2A7F50"/>
                 </a:solidFill>
                 <a:latin typeface="Calibri"/>
               </a:rPr>
@@ -4516,7 +4516,7 @@
             <a:r>
               <a:rPr sz="1150" b="1" i="0">
                 <a:solidFill>
-                  <a:srgbClr val="6B7280"/>
+                  <a:srgbClr val="686F7D"/>
                 </a:solidFill>
                 <a:latin typeface="Calibri"/>
               </a:rPr>
@@ -6085,7 +6085,7 @@
             <a:r>
               <a:rPr sz="980" b="1" i="0">
                 <a:solidFill>
-                  <a:srgbClr val="2E8B57"/>
+                  <a:srgbClr val="2A7F50"/>
                 </a:solidFill>
                 <a:latin typeface="Calibri"/>
               </a:rPr>
@@ -6333,7 +6333,7 @@
             <a:avLst/>
           </a:prstGeom>
           <a:solidFill>
-            <a:srgbClr val="2E8B57"/>
+            <a:srgbClr val="2A7F50"/>
           </a:solidFill>
           <a:ln>
             <a:noFill/>
@@ -6437,7 +6437,7 @@
             <a:r>
               <a:rPr sz="1250" b="1" i="0">
                 <a:solidFill>
-                  <a:srgbClr val="2E8B57"/>
+                  <a:srgbClr val="2A7F50"/>
                 </a:solidFill>
                 <a:latin typeface="Calibri"/>
               </a:rPr>
@@ -6655,7 +6655,7 @@
             <a:r>
               <a:rPr sz="850" b="0" i="0">
                 <a:solidFill>
-                  <a:srgbClr val="6B7280"/>
+                  <a:srgbClr val="686F7D"/>
                 </a:solidFill>
                 <a:latin typeface="Calibri"/>
               </a:rPr>
@@ -6725,7 +6725,7 @@
             <a:avLst/>
           </a:prstGeom>
           <a:solidFill>
-            <a:srgbClr val="2E8B57"/>
+            <a:srgbClr val="2A7F50"/>
           </a:solidFill>
           <a:ln>
             <a:noFill/>
@@ -6787,7 +6787,7 @@
             <a:r>
               <a:rPr sz="1200" b="1" i="0">
                 <a:solidFill>
-                  <a:srgbClr val="2E8B57"/>
+                  <a:srgbClr val="2A7F50"/>
                 </a:solidFill>
                 <a:latin typeface="Calibri"/>
               </a:rPr>
@@ -8094,7 +8094,7 @@
             <a:avLst/>
           </a:prstGeom>
           <a:solidFill>
-            <a:srgbClr val="B7791F"/>
+            <a:srgbClr val="99651A"/>
           </a:solidFill>
           <a:ln>
             <a:noFill/>
@@ -8138,7 +8138,7 @@
             <a:avLst/>
           </a:prstGeom>
           <a:solidFill>
-            <a:srgbClr val="B7791F"/>
+            <a:srgbClr val="99651A"/>
           </a:solidFill>
           <a:ln>
             <a:noFill/>
@@ -8382,7 +8382,7 @@
             <a:avLst/>
           </a:prstGeom>
           <a:solidFill>
-            <a:srgbClr val="2E8B57"/>
+            <a:srgbClr val="2A7F50"/>
           </a:solidFill>
           <a:ln>
             <a:noFill/>
@@ -8426,7 +8426,7 @@
             <a:avLst/>
           </a:prstGeom>
           <a:solidFill>
-            <a:srgbClr val="2E8B57"/>
+            <a:srgbClr val="2A7F50"/>
           </a:solidFill>
           <a:ln>
             <a:noFill/>
@@ -8626,7 +8626,7 @@
             <a:avLst/>
           </a:prstGeom>
           <a:solidFill>
-            <a:srgbClr val="2E8B57"/>
+            <a:srgbClr val="2A7F50"/>
           </a:solidFill>
           <a:ln>
             <a:noFill/>
@@ -8888,7 +8888,7 @@
             <a:avLst/>
           </a:prstGeom>
           <a:solidFill>
-            <a:srgbClr val="B7791F"/>
+            <a:srgbClr val="99651A"/>
           </a:solidFill>
           <a:ln>
             <a:noFill/>
@@ -9653,7 +9653,7 @@
             <a:avLst/>
           </a:prstGeom>
           <a:solidFill>
-            <a:srgbClr val="2E8B57"/>
+            <a:srgbClr val="2A7F50"/>
           </a:solidFill>
           <a:ln>
             <a:noFill/>
@@ -9697,7 +9697,7 @@
             <a:avLst/>
           </a:prstGeom>
           <a:solidFill>
-            <a:srgbClr val="2E8B57"/>
+            <a:srgbClr val="2A7F50"/>
           </a:solidFill>
           <a:ln>
             <a:noFill/>
@@ -9897,7 +9897,7 @@
             <a:avLst/>
           </a:prstGeom>
           <a:solidFill>
-            <a:srgbClr val="2E8B57"/>
+            <a:srgbClr val="2A7F50"/>
           </a:solidFill>
           <a:ln>
             <a:noFill/>
@@ -9941,7 +9941,7 @@
             <a:avLst/>
           </a:prstGeom>
           <a:solidFill>
-            <a:srgbClr val="2E8B57"/>
+            <a:srgbClr val="2A7F50"/>
           </a:solidFill>
           <a:ln>
             <a:noFill/>
@@ -10141,7 +10141,7 @@
             <a:avLst/>
           </a:prstGeom>
           <a:solidFill>
-            <a:srgbClr val="2E8B57"/>
+            <a:srgbClr val="2A7F50"/>
           </a:solidFill>
           <a:ln>
             <a:noFill/>
@@ -10185,7 +10185,7 @@
             <a:avLst/>
           </a:prstGeom>
           <a:solidFill>
-            <a:srgbClr val="2E8B57"/>
+            <a:srgbClr val="2A7F50"/>
           </a:solidFill>
           <a:ln>
             <a:noFill/>
@@ -12785,7 +12785,7 @@
             <a:avLst/>
           </a:prstGeom>
           <a:solidFill>
-            <a:srgbClr val="2E8B57"/>
+            <a:srgbClr val="2A7F50"/>
           </a:solidFill>
           <a:ln>
             <a:noFill/>
@@ -12847,7 +12847,7 @@
             <a:r>
               <a:rPr sz="1200" b="1" i="0">
                 <a:solidFill>
-                  <a:srgbClr val="2E8B57"/>
+                  <a:srgbClr val="2A7F50"/>
                 </a:solidFill>
                 <a:latin typeface="Calibri"/>
               </a:rPr>
@@ -13248,7 +13248,7 @@
             <a:avLst/>
           </a:prstGeom>
           <a:solidFill>
-            <a:srgbClr val="2E8B57"/>
+            <a:srgbClr val="2A7F50"/>
           </a:solidFill>
           <a:ln>
             <a:noFill/>
@@ -14064,7 +14064,7 @@
             <a:avLst/>
           </a:prstGeom>
           <a:solidFill>
-            <a:srgbClr val="2E8B57"/>
+            <a:srgbClr val="2A7F50"/>
           </a:solidFill>
           <a:ln>
             <a:noFill/>
@@ -14126,7 +14126,7 @@
             <a:r>
               <a:rPr sz="1200" b="1" i="0">
                 <a:solidFill>
-                  <a:srgbClr val="2E8B57"/>
+                  <a:srgbClr val="2A7F50"/>
                 </a:solidFill>
                 <a:latin typeface="Calibri"/>
               </a:rPr>
@@ -14416,7 +14416,7 @@
             <a:avLst/>
           </a:prstGeom>
           <a:solidFill>
-            <a:srgbClr val="B7791F"/>
+            <a:srgbClr val="99651A"/>
           </a:solidFill>
           <a:ln>
             <a:noFill/>
@@ -14478,7 +14478,7 @@
             <a:r>
               <a:rPr sz="1080" b="1" i="0">
                 <a:solidFill>
-                  <a:srgbClr val="B7791F"/>
+                  <a:srgbClr val="99651A"/>
                 </a:solidFill>
                 <a:latin typeface="Calibri"/>
               </a:rPr>
@@ -14592,7 +14592,7 @@
             <a:avLst/>
           </a:prstGeom>
           <a:solidFill>
-            <a:srgbClr val="B7791F"/>
+            <a:srgbClr val="99651A"/>
           </a:solidFill>
           <a:ln>
             <a:noFill/>
@@ -14654,7 +14654,7 @@
             <a:r>
               <a:rPr sz="1080" b="1" i="0">
                 <a:solidFill>
-                  <a:srgbClr val="B7791F"/>
+                  <a:srgbClr val="99651A"/>
                 </a:solidFill>
                 <a:latin typeface="Calibri"/>
               </a:rPr>

--- a/CostVision-CAPEE-Business-Case.pptx
+++ b/CostVision-CAPEE-Business-Case.pptx
@@ -509,7 +509,7 @@
           <a:lstStyle/>
           <a:p>
             <a:r>
-              <a:t>I want to start by saying what we do well, because none of this is a criticism of it. The left-hand card is our should-cost as it runs today. The method is trusted and thorough: a rigorous bottom-up build-up, applied across every commodity we buy, and it is the number we would defend in front of a supplier. Nothing I am about to propose changes that. What I want to talk about is the effort behind it. The setup is hands-on: a person chooses the material, the process and the machine, part by part. The data entry is manual: somebody opens the 3D model and the drawings, reads the geometry and the tolerances, and types them in. And when the economics move, somebody goes back and updates the rates by hand. The line at the bottom of that card is the size of it: between twelve and sixty-nine values typed per part depending on the commodity, and those counts come straight off our own input forms. None of that is wrong. It is just slow, and it is the reason we cost the parts we have time for rather than the parts we would like to. Now the right-hand side, and I want to be straight about why it is empty. I have not put a saving on this slide, because we have never timed this job and we have never compared this tool against a price we have actually paid. Any number I put there would be my estimate dressed up as a measurement. Four of these five are ours and we can get them quickly: how long a part takes, how much of that is reading and typing, how many parts we cost a year, and how many in a basket we never cost at all. Time a handful of parts in one commodity and you have the first two; the others are in our own records and the programme data. The fifth, E, is what the trial measures. Put those numbers in and the three boxes underneath fill themselves in: the hours we spend typing today, the hours we would get back, and how many more parts that time would cost. That is a business case we own rather than one I have handed you. And the green strip is the whole idea in one line: same method, same defensible answer, with the manual work taken out of it.</a:t>
+              <a:t>I want to start with what we do well, because this is not a criticism of it. The left-hand card is our should-cost as it runs today. The method is sound. It is bottom-up, it covers every commodity we buy, and it is the number we would defend to a supplier. Nothing I propose changes that. What I want to talk about is the effort behind it. A person picks the material, the process and the machine, part by part. Somebody opens the 3D model and the drawing, reads off the geometry and the tolerances, and types them in. When prices move, somebody updates the rates by hand. To give a sense of size: on CostVision's own input forms a part needs somewhere between about twelve and seventy values, depending on the commodity. I have not counted CAPEE's screens, so treat that as a guide. None of this is wrong. It is just slow, and it is why we cost the parts we have time for rather than all of them. Now the right-hand side, and why it is empty. I have not put a saving here. We have never timed this job, and the tool has never been compared with a price JLR actually paid. Any number I wrote in would be a guess. Four of these five numbers are ours, and we can get them quickly. Time a handful of parts and we have A and B. C and D are in our own records. E is what the trial measures. Put them in and the three boxes underneath work themselves out: hours spent typing, hours we would get back, and how many more parts that would cost. That makes it our business case, not mine. The green strip is the whole idea: same method, same answer we can defend, with the typing taken out.</a:t>
             </a:r>
           </a:p>
         </p:txBody>
@@ -579,7 +579,7 @@
           <a:lstStyle/>
           <a:p>
             <a:r>
-              <a:t>This is the smaller of the two and it is deliberately narrow. CAPEE does not move. It still does the costing, on the same screens, with the same maths, and nobody has to learn a new tool. The only thing that changes is where the input comes from. The engineer attaches the 3D model from inside CAPEE. The software measures it on a JLR server with no internet connection, and fixed rules turn those measurements into the values the form wants. The engineer then confirms the handful of things a 3D model genuinely cannot show, and CAPEE costs the part. The green card is what we get for free once the model is attached: weight, size, surface area, wall thickness, the hole and pocket counts, and so on. The amber card is the honest limit. The model cannot tell us what the part is made of. Steel and aluminium look identical in a 3D file and the weight differs by about three times, so somebody answers that, or it comes off the part master. Same for tolerance class, finish and heat treatment. The tool asks rather than guessing. The point of the blue strip is the one I would make to this room: there is no AI in this option at all, so it does not wait on an AI decision. We could start it now.</a:t>
+              <a:t>This is the smaller of the two, and it is narrow on purpose. CAPEE does not move. It still does the costing, on the same screens, with the same maths, and nobody learns a new tool. The only change is where the input comes from. The engineer attaches the 3D model from CAPEE. CostVision measures it, with no internet connection. That can be on a JLR server, or on a laptop using the Windows package, which needs no installer and no admin rights. Fixed rules turn the measurements into the values the form wants. The engineer confirms the few things a model cannot show, and CAPEE costs the part. The green card is what we get from the model: weight, size, surface area, walls, holes, pockets and so on. The amber card is the honest limit. A 3D file cannot tell steel from aluminium, and the weight differs by about three times. So the tool asks. Same for tolerance, finish and heat treatment. It asks rather than guesses. One more limit: an STL file has no feature table, so for a machined STL the engineer types the cycle time. The measuring and the rules exist today for thirteen commodities. What does not exist yet is the link into CAPEE. The point of the blue strip is simple. There is no AI here at all, so this does not wait for an AI decision. We could start it now.</a:t>
             </a:r>
           </a:p>
         </p:txBody>
@@ -649,7 +649,7 @@
           <a:lstStyle/>
           <a:p>
             <a:r>
-              <a:t>This is the slide I would spend the most time on, because it is the part of the case that is easy to under-sell. Six things the tool does, and all six of them work today. The split on the slide is not what works and what does not — it is what needs an AI service and what does not. The top row needs none at all. It is the fixed rules and our own rate book, so it is the same policy position as Option one. The bottom row reads something a person would otherwise read, so it needs a model, and that is the approval I am asking us to start. Taking the top row first. A list of parts and their three-D models goes in and every part comes back costed, with a report per part and per basket, with nobody sitting there and on our own rates. That one is built and it runs; today we cost the parts we have hours for and estimate the rest from a sample. Next to it is the one our buyers will care about most. Put a supplier's price next to our own build-up and the tool tells you which part of it the gap sits in and what to ask them about it. And the third turns design-for-cost from a list into a decision: it flags what makes a part expensive and puts a number on each change, ordered by what it saves. Now the bottom row. The first usually gets a reaction in the room. You take a photograph of a circuit board and the tool works out what is on it, builds the bill of materials, works out the board specification and costs it. That is a job that takes an electronics buyer a long time and most of us cannot do at all. Next along, an RFQ pack goes in and comes back as costed lines, ranked by where the money is, with a first draft of the negotiation brief written for you. And the last is the assistant, and I want to be precise about it. It does the setting up: it picks the process route and the machine and fills in what the geometry gives it, and then it comes back to a person with one question rather than a hundred. The blue strip at the bottom is the sentence I would want people to leave with. Where the AI is used it reads and sorts and sets up. It never sets a price. The money is still worked out by the same fixed rules and the same rate book we use now, so every number can be explained line by line, exactly as it can today.</a:t>
+              <a:t>This slide is about what CostVision can do beyond Option one. The split is not between what works and what does not. It is between what needs AI and what does not. The top row needs no AI at all, and it runs in the build we have given JLR today. First, a whole basket. A list of parts and their 3D models goes in, and each one is costed on our rates. It is a command-line run today, not a screen. Where the geometry cannot decide something, like the material, it does not guess. It comes back with one question that covers every part it affects. Second, supplier quotes. Put their price next to our build-up and it shows, bucket by bucket, where the gap is and what to ask. Third, design changes. It flags what makes a part expensive and suggests changes with an estimated saving. Now the bottom row. These need the AI mode, and I want to be clear: AI is switched off in the JLR build. The code is there, so it could be turned on later with a setting, but these three screens are hidden until it is. They are a board photo read into a parts list, an RFQ pack read into lines, and an assistant that helps set up a part. With AI on, each user is also rate-limited. The blue strip is the rule I would want you to leave with. Even with AI on, it only reads and sorts. It never sets a price. The money is plain arithmetic on our rate book, so every number can be traced back to a rate.</a:t>
             </a:r>
           </a:p>
         </p:txBody>
@@ -719,7 +719,7 @@
           <a:lstStyle/>
           <a:p>
             <a:r>
-              <a:t>This is what we get for it, written in kind rather than in pounds, for the reason I gave on the first slide: we have never timed this job and never checked the tool against a price we paid, so a pound figure from me would be a guess. The left column is Option one, and it is all about the same thing: the time we spend putting numbers into CAPEE by hand. The typing goes — between twelve and sixty-nine values a part, depending on the commodity, now filled from the model. With nothing typed there is nothing to mistype, so the checking of our own transcription goes with it. It gives the same answer every time, so parts costed by different engineers are comparable. Re-costing becomes nearly free: a new volume or a new set of rates does not mean reading the model again. And the saving is not a one-off — it repeats on every part, so it grows with how many we cost. What is left is the judgement: material, tolerance class, finish and heat treatment, the calls only we can make. That column can start now, because there is no AI in it to approve. And the last line points back at slide one: put our four numbers in and all of that becomes hours. The right column is wider because Option two genuinely has more in it. It runs on its own — parts go in and costed reports come out, and a person answers only what the model cannot show. It uses the same method for everything we make, so a plastic clip and a machined bracket are built up the same way and can sit in the same report. It costs electronics from a photograph of the board, which is work we largely cannot do today. It costs software as well: forty-three modules, from powertrain and driver assistance through to the cloud back end, which matters more every programme. Then the second half of that column is the part I would put to purchasing. It shows where a supplier's price differs from our own build-up and which part of the cost the gap sits in. Then it tells us what to do about it: what to go after, what to ask them, and what it is worth over a year. A whole RFQ pack can go in and come back priced and put in order of money. And design changes come back with a price on them rather than as a list of suggestions. The green strip is the sequencing point. Option one's benefits arrive first and we keep them. Option two's depend on the accuracy figure Option one produces, which is why these are an order rather than a choice.</a:t>
+              <a:t>This is what we get from each option, written in kind rather than in pounds. The reason is the same as on slide one. We have never timed this job, and the tool has never been checked against a price JLR paid. A pound figure from me would be a guess. The left column is Option one, and it is all about typing. The typing goes: roughly twelve to seventy values a part now come from the model. Nothing typed means nothing mistyped. Everyone gets the same answer for the same part. A re-cost at a new volume or new rates is nearly free. The saving repeats on every part. What is left is the judgement: material, tolerance, finish, heat treatment. And there is no AI in it, so it can start now. The right column is wider because Option two does more. A basket can run on its own, and a person answers only what the model cannot show. It uses one method for metal, plastic, rubber, composites, electronics and assemblies: nineteen manufacturing processes in all, across twenty regions. It costs PCB fabrication, PCBA and harnesses from their inputs. Reading a board from a photo needs the AI mode, which is off at JLR. It also has a forty-nine-module software cost model. The second half is for purchasing. It shows where a supplier's price differs from our build-up, bucket by bucket, and what to ask. An RFQ pack can be read in, but again only with AI on. And design changes come with an estimated saving. The green strip is about order. Option one's benefits come first and we keep them. Option two depends on the accuracy figure that Option one produces.</a:t>
             </a:r>
           </a:p>
         </p:txBody>
@@ -789,7 +789,7 @@
           <a:lstStyle/>
           <a:p>
             <a:r>
-              <a:t>So this is the decision, and I have split it into what I want today and what I do not. On the left, Option one: approve the trial. One commodity, thirty to fifty parts we have already bought, run inside CAPEE. On the right, Option two: I am not asking you to decide it. The bulk run itself is built — it costs a basket of our own parts unattended, on our own rates. What I am asking is that we start the AI approval alongside the trial, because that is the long pole and there is no sense discovering at the end of the trial that we now have to begin it. The two cards underneath are what each one needs. Option one needs a server, a way to pass numbers into CAPEE, some parts where we know what we paid, and an engineer from the commodity team for the trial. Option two needs all of that, plus the AI approval and our own rate book loaded into the tool. The rest of it is built. The green strip is what we get out of the trial and it is the reason to do it: two numbers that nobody in this company can state today. How close the tool gets to a price we actually paid, and how much of the input it fills on its own. Until we have those, any conversation about Option two is people trading opinions. Then three short things I want to say plainly rather than have asked. The first is the governance point and it is the one I would repeat if you take nothing else away: the AI reads, sorts and sets up, and it never sets a price. The money comes out of the same fixed rules and the same rate book as today, so every number can be defended line by line exactly as it can now. The second is the exit. We have never compared this against a price we have paid, and it has never been run on a JLR laptop. If the trial says the tool is not close enough, we stop, and what we will have spent is our own engineering time — that is precisely why I am asking for a trial and not a rollout. And the third is the honest answer to how long: nobody has sized it. It waits on one answer from IT about how CAPEE is built, and the sizing comes back with that answer rather than being invented now.</a:t>
+              <a:t>So this is the decision. I have split it into what I am asking for today and what I am not. On the left, Option one: approve the trial. One commodity, thirty to fifty parts we have already bought, run inside CAPEE. On the right, Option two: I am not asking you to decide it today. The bulk run is already built, and it needs no AI. What it needs is our own rates. JLR's rate card can be loaded through the Rate Converter workbook, which has no macros. The built-in rate library is dated sixteenth of June 2026, so our own card matters. The two cards underneath say what each option needs. Option one needs somewhere to run the measuring, a way to pass numbers into CAPEE, parts where we know the price we paid, and an engineer for the trial. Option two needs that plus our rates. AI approval is only needed if we later want the photo, RFQ and assistant features. The green strip is why the trial matters. It gives us two numbers nobody can state today: how close the tool gets to a price we paid, and how much of the input it fills itself. Then three plain points. AI is off at JLR, and even when on it never sets a price. Second, the exit. Here is what is proven: the engine matches a hand calculation to under 0.01 percent on a reference part, six real production parts are pinned in a regression test, and there are 2,438 automated tests. What is not proven is accuracy against a price JLR paid. If the trial says it is not close enough, we stop, having spent only our own time. Third, how long. Nobody has sized it. That waits on one answer from IT about how CAPEE is built.</a:t>
             </a:r>
           </a:p>
         </p:txBody>
@@ -4430,7 +4430,7 @@
                 </a:solidFill>
                 <a:latin typeface="Calibri"/>
               </a:rPr>
-              <a:t>drawings, then typed in — 12 to 69 values per part.</a:t>
+              <a:t>drawings, then typed in. About 12 to 70 values a part.</a:t>
             </a:r>
           </a:p>
           <a:p>
@@ -7162,7 +7162,7 @@
                 </a:solidFill>
                 <a:latin typeface="Calibri"/>
               </a:rPr>
-              <a:t>CAPEE keeps doing the costing. The engineer stops typing the input and starts checking it. Reads the 3D model only, so no AI is involved.</a:t>
+              <a:t>CAPEE keeps doing the costing. The engineer stops typing the input and starts checking it. It measures the 3D model only, so no AI is involved.</a:t>
             </a:r>
           </a:p>
         </p:txBody>
@@ -7694,7 +7694,7 @@
                 </a:solidFill>
                 <a:latin typeface="Calibri"/>
               </a:rPr>
-              <a:t>On a JLR server, with no internet connection</a:t>
+              <a:t>On a JLR server or laptop, with no internet</a:t>
             </a:r>
           </a:p>
         </p:txBody>
@@ -8772,7 +8772,7 @@
                 </a:solidFill>
                 <a:latin typeface="Calibri"/>
               </a:rPr>
-              <a:t>gear teeth, draft, machined face count.</a:t>
+              <a:t>gear teeth, machined faces.</a:t>
             </a:r>
           </a:p>
           <a:p>
@@ -9256,7 +9256,7 @@
                 </a:solidFill>
                 <a:latin typeface="Calibri"/>
               </a:rPr>
-              <a:t>The 3D model is measured by ordinary engineering software, the same kind of geometry engine that sits inside a CAD package, and the values are filled in by fixed rules. There is no AI in this option, so it needs no AI approval. The file is read on a JLR server and never leaves it, and CAPEE still does the costing on the same screens.</a:t>
+              <a:t>The 3D model is measured by the same kind of geometry engine that sits inside a CAD package. Fixed rules fill in the values. There is no AI in this option, so it needs no AI approval. The file never leaves JLR, and CAPEE still does the costing on the same screens.</a:t>
             </a:r>
           </a:p>
         </p:txBody>
@@ -9585,7 +9585,7 @@
                 </a:solidFill>
                 <a:latin typeface="Calibri"/>
               </a:rPr>
-              <a:t>All six work today. The top row needs no AI at all; the bottom row needs an AI service, which is the approval to start now.</a:t>
+              <a:t>The top row runs in the JLR build today, with no AI. The bottom row needs the optional AI mode, which is switched off at JLR.</a:t>
             </a:r>
           </a:p>
         </p:txBody>
@@ -9829,7 +9829,7 @@
                 </a:solidFill>
                 <a:latin typeface="Calibri"/>
               </a:rPr>
-              <a:t>A list of parts and their 3D models goes in. Every part costed and reported with nobody sitting there, on our own rates.</a:t>
+              <a:t>A list of parts and their 3D models goes in. Each part is costed on our rates. What it cannot decide comes back as one question.</a:t>
             </a:r>
           </a:p>
         </p:txBody>
@@ -10317,7 +10317,7 @@
                 </a:solidFill>
                 <a:latin typeface="Calibri"/>
               </a:rPr>
-              <a:t>It flags what makes a part expensive and puts a number on each change, ranked by the money it would save.</a:t>
+              <a:t>It flags what makes a part expensive and suggests changes, with an estimated saving on each.</a:t>
             </a:r>
           </a:p>
         </p:txBody>
@@ -10561,7 +10561,7 @@
                 </a:solidFill>
                 <a:latin typeface="Calibri"/>
               </a:rPr>
-              <a:t>Take a picture of a circuit board. The tool works out what is on it, builds the bill of materials and the board spec, and costs it.</a:t>
+              <a:t>AI mode, off at JLR. A photo of a circuit board is read into a parts list and board spec, then costed by the engine.</a:t>
             </a:r>
           </a:p>
         </p:txBody>
@@ -10805,7 +10805,7 @@
                 </a:solidFill>
                 <a:latin typeface="Calibri"/>
               </a:rPr>
-              <a:t>The tool pulls the line items out of the pack, costs each one, ranks them by money and drafts the negotiation brief.</a:t>
+              <a:t>AI mode, off at JLR. The line items are read out of the pack, then each one is costed by the engine.</a:t>
             </a:r>
           </a:p>
         </p:txBody>
@@ -11049,7 +11049,7 @@
                 </a:solidFill>
                 <a:latin typeface="Calibri"/>
               </a:rPr>
-              <a:t>It picks the process route and the machine and fills in what the geometry gives, then asks one question instead of a hundred.</a:t>
+              <a:t>AI mode, off at JLR. It suggests the process route and fills in the form. The engineer checks it and the engine prices it.</a:t>
             </a:r>
           </a:p>
         </p:txBody>
@@ -11223,7 +11223,7 @@
                 </a:solidFill>
                 <a:latin typeface="Calibri"/>
               </a:rPr>
-              <a:t>Where the AI is used it reads, sorts and sets up — the photo, the pack, the drawing, the process route. It never sets a price. The money is worked out by the same fixed rules and the same rate book in every one of the six, so every number can be explained line by line.</a:t>
+              <a:t>Where the AI mode is used, it only reads and sorts. It never sets a price. The money comes from the same fixed rules and the same rate book in all six, so every number can be traced to a rate. With AI off, as at JLR, the top row works exactly the same.</a:t>
             </a:r>
           </a:p>
         </p:txBody>
@@ -11747,7 +11747,7 @@
                 </a:solidFill>
                 <a:latin typeface="Calibri"/>
               </a:rPr>
-              <a:t>Between 12 and 69 values per part.</a:t>
+              <a:t>About 12 to 70 values per part.</a:t>
             </a:r>
           </a:p>
           <a:p>
@@ -12199,7 +12199,7 @@
                 </a:solidFill>
                 <a:latin typeface="Calibri"/>
               </a:rPr>
-              <a:t>It runs on its own</a:t>
+              <a:t>A basket runs on its own</a:t>
             </a:r>
           </a:p>
           <a:p>
@@ -12218,7 +12218,7 @@
                 </a:solidFill>
                 <a:latin typeface="Calibri"/>
               </a:rPr>
-              <a:t>Parts go in, costed reports come out. A</a:t>
+              <a:t>Parts go in, costed results come out.</a:t>
             </a:r>
           </a:p>
           <a:p>
@@ -12237,7 +12237,7 @@
                 </a:solidFill>
                 <a:latin typeface="Calibri"/>
               </a:rPr>
-              <a:t>person answers only what the model cannot show.</a:t>
+              <a:t>A person answers only the gaps.</a:t>
             </a:r>
           </a:p>
           <a:p>
@@ -12352,7 +12352,7 @@
                 </a:solidFill>
                 <a:latin typeface="Calibri"/>
               </a:rPr>
-              <a:t>A photo of a circuit board gives us the parts</a:t>
+              <a:t>PCB fabrication, PCBA and wiring harness.</a:t>
             </a:r>
           </a:p>
           <a:p>
@@ -12371,7 +12371,7 @@
                 </a:solidFill>
                 <a:latin typeface="Calibri"/>
               </a:rPr>
-              <a:t>list, the board spec and a price.</a:t>
+              <a:t>A board photo needs the AI mode, off at JLR.</a:t>
             </a:r>
           </a:p>
           <a:p>
@@ -12419,7 +12419,7 @@
                 </a:solidFill>
                 <a:latin typeface="Calibri"/>
               </a:rPr>
-              <a:t>43 modules, from powertrain and driver</a:t>
+              <a:t>A 49-module model, from powertrain and</a:t>
             </a:r>
           </a:p>
           <a:p>
@@ -12438,7 +12438,7 @@
                 </a:solidFill>
                 <a:latin typeface="Calibri"/>
               </a:rPr>
-              <a:t>assistance through to cloud.</a:t>
+              <a:t>driver assistance through to cloud.</a:t>
             </a:r>
           </a:p>
         </p:txBody>
@@ -12633,7 +12633,7 @@
                 </a:solidFill>
                 <a:latin typeface="Calibri"/>
               </a:rPr>
-              <a:t>The line items are pulled out, priced and put</a:t>
+              <a:t>Line items read out and priced. Needs the AI</a:t>
             </a:r>
           </a:p>
           <a:p>
@@ -12652,7 +12652,7 @@
                 </a:solidFill>
                 <a:latin typeface="Calibri"/>
               </a:rPr>
-              <a:t>in order of money.</a:t>
+              <a:t>mode, which is off at JLR.</a:t>
             </a:r>
           </a:p>
           <a:p>
@@ -12700,7 +12700,7 @@
                 </a:solidFill>
                 <a:latin typeface="Calibri"/>
               </a:rPr>
-              <a:t>What makes the part expensive, and what</a:t>
+              <a:t>What makes the part expensive, and an</a:t>
             </a:r>
           </a:p>
           <a:p>
@@ -12719,7 +12719,7 @@
                 </a:solidFill>
                 <a:latin typeface="Calibri"/>
               </a:rPr>
-              <a:t>each change would save.</a:t>
+              <a:t>estimated saving for each change.</a:t>
             </a:r>
           </a:p>
         </p:txBody>
@@ -13551,7 +13551,7 @@
                 </a:solidFill>
                 <a:latin typeface="Calibri"/>
               </a:rPr>
-              <a:t>The bulk run is built and runs unattended on our own</a:t>
+              <a:t>The bulk run is built and needs no AI. Load our own</a:t>
             </a:r>
           </a:p>
           <a:p>
@@ -13570,7 +13570,7 @@
                 </a:solidFill>
                 <a:latin typeface="Calibri"/>
               </a:rPr>
-              <a:t>parts. Start the AI approval so it is not what holds us up.</a:t>
+              <a:t>rates and try it on one basket after the trial.</a:t>
             </a:r>
           </a:p>
         </p:txBody>
@@ -13746,7 +13746,7 @@
                 </a:solidFill>
                 <a:latin typeface="Calibri"/>
               </a:rPr>
-              <a:t>A server to run the measurement on, and a way to pass numbers into CAPEE</a:t>
+              <a:t>A server or laptop to measure on, and a way to pass numbers into CAPEE</a:t>
             </a:r>
           </a:p>
           <a:p>
@@ -13960,7 +13960,7 @@
                 </a:solidFill>
                 <a:latin typeface="Calibri"/>
               </a:rPr>
-              <a:t>Everything above, plus approval to use AI — for the</a:t>
+              <a:t>Everything above, plus our own rate card, loaded</a:t>
             </a:r>
           </a:p>
           <a:p>
@@ -13979,7 +13979,7 @@
                 </a:solidFill>
                 <a:latin typeface="Calibri"/>
               </a:rPr>
-              <a:t>three on the last slide that read something</a:t>
+              <a:t>through the JLR Rate Converter (no macros)</a:t>
             </a:r>
           </a:p>
           <a:p>
@@ -13998,7 +13998,7 @@
                 </a:solidFill>
                 <a:latin typeface="Calibri"/>
               </a:rPr>
-              <a:t>Our own rate book loaded. The rest is built</a:t>
+              <a:t>AI approval only if we want the three AI features</a:t>
             </a:r>
           </a:p>
         </p:txBody>
@@ -14348,7 +14348,7 @@
                 </a:solidFill>
                 <a:latin typeface="Calibri"/>
               </a:rPr>
-              <a:t>The AI reads, sorts and sets up. It never sets a price — the money comes from the same fixed rules we use today.</a:t>
+              <a:t>AI is off at JLR. Even when on, it never sets a price. The money is plain arithmetic on our rate book.</a:t>
             </a:r>
           </a:p>
         </p:txBody>
@@ -14524,7 +14524,7 @@
                 </a:solidFill>
                 <a:latin typeface="Calibri"/>
               </a:rPr>
-              <a:t>Never checked against a price JLR has paid, and never yet run on a JLR laptop. If the answer is poor we stop, having spent only our own time.</a:t>
+              <a:t>Never yet checked against a price JLR paid. If the answer is poor, we stop, having spent only our own time.</a:t>
             </a:r>
           </a:p>
         </p:txBody>

--- a/CostVision-CAPEE-Business-Case.pptx
+++ b/CostVision-CAPEE-Business-Case.pptx
@@ -649,7 +649,7 @@
           <a:lstStyle/>
           <a:p>
             <a:r>
-              <a:t>This slide is about what CostVision can do beyond Option one. The split is not between what works and what does not. It is between what needs AI and what does not. The top row needs no AI at all, and it runs in the build we have given JLR today. First, a whole basket. A list of parts and their 3D models goes in, and each one is costed on our rates. It is a command-line run today, not a screen. Where the geometry cannot decide something, like the material, it does not guess. It comes back with one question that covers every part it affects. Second, supplier quotes. Put their price next to our build-up and it shows, bucket by bucket, where the gap is and what to ask. Third, design changes. It flags what makes a part expensive and suggests changes with an estimated saving. Now the bottom row. These need the AI mode, and I want to be clear: AI is switched off in the JLR build. The code is there, so it could be turned on later with a setting, but these three screens are hidden until it is. They are a board photo read into a parts list, an RFQ pack read into lines, and an assistant that helps set up a part. With AI on, each user is also rate-limited. The blue strip is the rule I would want you to leave with. Even with AI on, it only reads and sorts. It never sets a price. The money is plain arithmetic on our rate book, so every number can be traced back to a rate.</a:t>
+              <a:t>This slide is about what CostVision can do beyond Option one. The split is not between what works and what does not. It is between what needs AI and what does not. The top row needs no AI at all, and it runs in the build we have given JLR today. First, a whole basket. A list of parts and their 3D models goes in, and each one is costed on our rates. It is a command-line run today, not a screen. Where the geometry cannot decide something, like the material, it does not guess. It comes back with one question that covers every part it affects. Second, supplier quotes. Put their price next to our build-up and it shows, bucket by bucket, where the gap is and what to ask. Third, design changes. It flags what makes a part expensive and suggests changes with an estimated saving. Now the bottom row. These need the AI mode, and I want to be clear: the JLR build has no API key yet. The code is there, so adding a key turns it on, but these three screens are hidden until it is. They are a board photo read into a parts list, an RFQ pack read into lines, and an assistant that helps set up a part. With AI on, each user is also rate-limited. The blue strip is the rule I would want you to leave with. Even with AI on, it only reads and sorts. It never sets a price. The money is plain arithmetic on our rate book, so every number can be traced back to a rate.</a:t>
             </a:r>
           </a:p>
         </p:txBody>
@@ -719,7 +719,7 @@
           <a:lstStyle/>
           <a:p>
             <a:r>
-              <a:t>This is what we get from each option, written in kind rather than in pounds. The reason is the same as on slide one. We have never timed this job, and the tool has never been checked against a price JLR paid. A pound figure from me would be a guess. The left column is Option one, and it is all about typing. The typing goes: roughly twelve to seventy values a part now come from the model. Nothing typed means nothing mistyped. Everyone gets the same answer for the same part. A re-cost at a new volume or new rates is nearly free. The saving repeats on every part. What is left is the judgement: material, tolerance, finish, heat treatment. And there is no AI in it, so it can start now. The right column is wider because Option two does more. A basket can run on its own, and a person answers only what the model cannot show. It uses one method for metal, plastic, rubber, composites, electronics and assemblies: nineteen manufacturing processes in all, across twenty regions. It costs PCB fabrication, PCBA and harnesses from their inputs. Reading a board from a photo needs the AI mode, which is off at JLR. It also has a forty-nine-module software cost model. The second half is for purchasing. It shows where a supplier's price differs from our build-up, bucket by bucket, and what to ask. An RFQ pack can be read in, but again only with AI on. And design changes come with an estimated saving. The green strip is about order. Option one's benefits come first and we keep them. Option two depends on the accuracy figure that Option one produces.</a:t>
+              <a:t>This is what we get from each option, written in kind rather than in pounds. The reason is the same as on slide one. We have never timed this job, and the tool has never been checked against a price JLR paid. A pound figure from me would be a guess. The left column is Option one, and it is all about typing. The typing goes: roughly twelve to seventy values a part now come from the model. Nothing typed means nothing mistyped. Everyone gets the same answer for the same part. A re-cost at a new volume or new rates is nearly free. The saving repeats on every part. What is left is the judgement: material, tolerance, finish, heat treatment. And there is no AI in it, so it can start now. The right column is wider because Option two does more. A basket can run on its own, and a person answers only what the model cannot show. It uses one method for metal, plastic, rubber, composites, electronics and assemblies: nineteen manufacturing processes in all, across twenty regions. It costs PCB fabrication, PCBA and harnesses from their inputs. Reading a board from a photo needs the AI mode and a key. It also has a forty-nine-module software cost model. The second half is for purchasing. It shows where a supplier's price differs from our build-up, bucket by bucket, and what to ask. An RFQ pack can be read in, but again only with AI on. And design changes come with an estimated saving. The green strip is about order. Option one's benefits come first and we keep them. Option two depends on the accuracy figure that Option one produces.</a:t>
             </a:r>
           </a:p>
         </p:txBody>
@@ -789,7 +789,7 @@
           <a:lstStyle/>
           <a:p>
             <a:r>
-              <a:t>So this is the decision. I have split it into what I am asking for today and what I am not. On the left, Option one: approve the trial. One commodity, thirty to fifty parts we have already bought, run inside CAPEE. On the right, Option two: I am not asking you to decide it today. The bulk run is already built, and it needs no AI. What it needs is our own rates. JLR's rate card can be loaded through the Rate Converter workbook, which has no macros. The built-in rate library is dated sixteenth of June 2026, so our own card matters. The two cards underneath say what each option needs. Option one needs somewhere to run the measuring, a way to pass numbers into CAPEE, parts where we know the price we paid, and an engineer for the trial. Option two needs that plus our rates. AI approval is only needed if we later want the photo, RFQ and assistant features. The green strip is why the trial matters. It gives us two numbers nobody can state today: how close the tool gets to a price we paid, and how much of the input it fills itself. Then three plain points. AI is off at JLR, and even when on it never sets a price. Second, the exit. Here is what is proven: the engine matches a hand calculation to under 0.01 percent on a reference part, six real production parts are pinned in a regression test, and there are 2,438 automated tests. What is not proven is accuracy against a price JLR paid. If the trial says it is not close enough, we stop, having spent only our own time. Third, how long. Nobody has sized it. That waits on one answer from IT about how CAPEE is built.</a:t>
+              <a:t>So this is the decision. I have split it into what I am asking for today and what I am not. On the left, Option one: approve the trial. One commodity, thirty to fifty parts we have already bought, run inside CAPEE. On the right, Option two: I am not asking you to decide it today. The bulk run is already built, and it needs no AI. What it needs is our own rates. JLR's rate card can be loaded through the Rate Converter workbook, which has no macros. The built-in rate library is dated sixteenth of June 2026, so our own card matters. The two cards underneath say what each option needs. Option one needs somewhere to run the measuring, a way to pass numbers into CAPEE, parts where we know the price we paid, and an engineer for the trial. Option two needs that plus our rates. AI approval is only needed if we later want the photo, RFQ and assistant features. The green strip is why the trial matters. It gives us two numbers nobody can state today: how close the tool gets to a price we paid, and how much of the input it fills itself. Then three plain points. AI needs a key at JLR, and even when on it never sets a price. Second, the exit. Here is what is proven: the engine matches a hand calculation to under 0.01 percent on a reference part, six real production parts are pinned in a regression test, and there are 2,438 automated tests. What is not proven is accuracy against a price JLR paid. If the trial says it is not close enough, we stop, having spent only our own time. Third, how long. Nobody has sized it. That waits on one answer from IT about how CAPEE is built.</a:t>
             </a:r>
           </a:p>
         </p:txBody>
@@ -9585,7 +9585,7 @@
                 </a:solidFill>
                 <a:latin typeface="Calibri"/>
               </a:rPr>
-              <a:t>The top row runs in the JLR build today, with no AI. The bottom row needs the optional AI mode, which is switched off at JLR.</a:t>
+              <a:t>The top row runs in the JLR build today, with no AI. The bottom row needs the optional AI mode, which needs an API key.</a:t>
             </a:r>
           </a:p>
         </p:txBody>
@@ -10561,7 +10561,7 @@
                 </a:solidFill>
                 <a:latin typeface="Calibri"/>
               </a:rPr>
-              <a:t>AI mode, off at JLR. A photo of a circuit board is read into a parts list and board spec, then costed by the engine.</a:t>
+              <a:t>AI mode, needs a key. The model reads the chips and lists the parts; the tool prices every line from its own tables and costs the board.</a:t>
             </a:r>
           </a:p>
         </p:txBody>
@@ -10805,7 +10805,7 @@
                 </a:solidFill>
                 <a:latin typeface="Calibri"/>
               </a:rPr>
-              <a:t>AI mode, off at JLR. The line items are read out of the pack, then each one is costed by the engine.</a:t>
+              <a:t>AI mode, needs a key. The line items are read out of the pack, then each one is costed by the engine.</a:t>
             </a:r>
           </a:p>
         </p:txBody>
@@ -11049,7 +11049,7 @@
                 </a:solidFill>
                 <a:latin typeface="Calibri"/>
               </a:rPr>
-              <a:t>AI mode, off at JLR. It suggests the process route and fills in the form. The engineer checks it and the engine prices it.</a:t>
+              <a:t>AI mode, needs a key. It suggests the process route and fills in the form. The engineer checks it and the engine prices it.</a:t>
             </a:r>
           </a:p>
         </p:txBody>
@@ -11223,7 +11223,7 @@
                 </a:solidFill>
                 <a:latin typeface="Calibri"/>
               </a:rPr>
-              <a:t>Where the AI mode is used, it only reads and sorts. It never sets a price. The money comes from the same fixed rules and the same rate book in all six, so every number can be traced to a rate. With AI off, as at JLR, the top row works exactly the same.</a:t>
+              <a:t>Where the AI mode is used, it only reads and sorts. It never sets a price. The money comes from the same fixed rules and the same rate book in all six, so every number can be traced to a rate. Without a key, as at JLR today, the top row works exactly the same.</a:t>
             </a:r>
           </a:p>
         </p:txBody>
@@ -12371,7 +12371,7 @@
                 </a:solidFill>
                 <a:latin typeface="Calibri"/>
               </a:rPr>
-              <a:t>A board photo needs the AI mode, off at JLR.</a:t>
+              <a:t>A board photo needs the AI mode and a key.</a:t>
             </a:r>
           </a:p>
           <a:p>
@@ -12652,7 +12652,7 @@
                 </a:solidFill>
                 <a:latin typeface="Calibri"/>
               </a:rPr>
-              <a:t>mode, which is off at JLR.</a:t>
+              <a:t>mode, which needs a key.</a:t>
             </a:r>
           </a:p>
           <a:p>
@@ -14348,7 +14348,7 @@
                 </a:solidFill>
                 <a:latin typeface="Calibri"/>
               </a:rPr>
-              <a:t>AI is off at JLR. Even when on, it never sets a price. The money is plain arithmetic on our rate book.</a:t>
+              <a:t>AI needs an API key. Even when on, it never sets a price. The money is plain arithmetic on our rate book.</a:t>
             </a:r>
           </a:p>
         </p:txBody>
